--- a/彈琴歌唱讚美你.pptx
+++ b/彈琴歌唱讚美你.pptx
@@ -167,10 +167,9 @@
           <a:lstStyle/>
           <a:p>
             <a:r>
-              <a:rPr lang="zh-TW" altLang="en-US" smtClean="0"/>
+              <a:rPr lang="zh-TW" altLang="en-US"/>
               <a:t>按一下以編輯母片標題樣式</a:t>
             </a:r>
-            <a:endParaRPr lang="zh-TW" altLang="en-US"/>
           </a:p>
         </p:txBody>
       </p:sp>
@@ -286,10 +285,9 @@
           </a:lstStyle>
           <a:p>
             <a:r>
-              <a:rPr lang="zh-TW" altLang="en-US" smtClean="0"/>
+              <a:rPr lang="zh-TW" altLang="en-US"/>
               <a:t>按一下以編輯母片副標題樣式</a:t>
             </a:r>
-            <a:endParaRPr lang="zh-TW" altLang="en-US"/>
           </a:p>
         </p:txBody>
       </p:sp>
@@ -310,7 +308,7 @@
           <a:p>
             <a:fld id="{5B80AD86-2C1E-4B28-87F6-A194458C1C65}" type="datetimeFigureOut">
               <a:rPr lang="zh-TW" altLang="en-US" smtClean="0"/>
-              <a:t>2023/7/7</a:t>
+              <a:t>2024/3/16</a:t>
             </a:fld>
             <a:endParaRPr lang="zh-TW" altLang="en-US"/>
           </a:p>
@@ -399,10 +397,9 @@
           <a:lstStyle/>
           <a:p>
             <a:r>
-              <a:rPr lang="zh-TW" altLang="en-US" smtClean="0"/>
+              <a:rPr lang="zh-TW" altLang="en-US"/>
               <a:t>按一下以編輯母片標題樣式</a:t>
             </a:r>
-            <a:endParaRPr lang="zh-TW" altLang="en-US"/>
           </a:p>
         </p:txBody>
       </p:sp>
@@ -423,38 +420,37 @@
           <a:p>
             <a:pPr lvl="0"/>
             <a:r>
-              <a:rPr lang="zh-TW" altLang="en-US" smtClean="0"/>
+              <a:rPr lang="zh-TW" altLang="en-US"/>
               <a:t>按一下以編輯母片文字樣式</a:t>
             </a:r>
           </a:p>
           <a:p>
             <a:pPr lvl="1"/>
             <a:r>
-              <a:rPr lang="zh-TW" altLang="en-US" smtClean="0"/>
+              <a:rPr lang="zh-TW" altLang="en-US"/>
               <a:t>第二層</a:t>
             </a:r>
           </a:p>
           <a:p>
             <a:pPr lvl="2"/>
             <a:r>
-              <a:rPr lang="zh-TW" altLang="en-US" smtClean="0"/>
+              <a:rPr lang="zh-TW" altLang="en-US"/>
               <a:t>第三層</a:t>
             </a:r>
           </a:p>
           <a:p>
             <a:pPr lvl="3"/>
             <a:r>
-              <a:rPr lang="zh-TW" altLang="en-US" smtClean="0"/>
+              <a:rPr lang="zh-TW" altLang="en-US"/>
               <a:t>第四層</a:t>
             </a:r>
           </a:p>
           <a:p>
             <a:pPr lvl="4"/>
             <a:r>
-              <a:rPr lang="zh-TW" altLang="en-US" smtClean="0"/>
+              <a:rPr lang="zh-TW" altLang="en-US"/>
               <a:t>第五層</a:t>
             </a:r>
-            <a:endParaRPr lang="zh-TW" altLang="en-US"/>
           </a:p>
         </p:txBody>
       </p:sp>
@@ -475,7 +471,7 @@
           <a:p>
             <a:fld id="{5B80AD86-2C1E-4B28-87F6-A194458C1C65}" type="datetimeFigureOut">
               <a:rPr lang="zh-TW" altLang="en-US" smtClean="0"/>
-              <a:t>2023/7/7</a:t>
+              <a:t>2024/3/16</a:t>
             </a:fld>
             <a:endParaRPr lang="zh-TW" altLang="en-US"/>
           </a:p>
@@ -569,10 +565,9 @@
           <a:lstStyle/>
           <a:p>
             <a:r>
-              <a:rPr lang="zh-TW" altLang="en-US" smtClean="0"/>
+              <a:rPr lang="zh-TW" altLang="en-US"/>
               <a:t>按一下以編輯母片標題樣式</a:t>
             </a:r>
-            <a:endParaRPr lang="zh-TW" altLang="en-US"/>
           </a:p>
         </p:txBody>
       </p:sp>
@@ -598,38 +593,37 @@
           <a:p>
             <a:pPr lvl="0"/>
             <a:r>
-              <a:rPr lang="zh-TW" altLang="en-US" smtClean="0"/>
+              <a:rPr lang="zh-TW" altLang="en-US"/>
               <a:t>按一下以編輯母片文字樣式</a:t>
             </a:r>
           </a:p>
           <a:p>
             <a:pPr lvl="1"/>
             <a:r>
-              <a:rPr lang="zh-TW" altLang="en-US" smtClean="0"/>
+              <a:rPr lang="zh-TW" altLang="en-US"/>
               <a:t>第二層</a:t>
             </a:r>
           </a:p>
           <a:p>
             <a:pPr lvl="2"/>
             <a:r>
-              <a:rPr lang="zh-TW" altLang="en-US" smtClean="0"/>
+              <a:rPr lang="zh-TW" altLang="en-US"/>
               <a:t>第三層</a:t>
             </a:r>
           </a:p>
           <a:p>
             <a:pPr lvl="3"/>
             <a:r>
-              <a:rPr lang="zh-TW" altLang="en-US" smtClean="0"/>
+              <a:rPr lang="zh-TW" altLang="en-US"/>
               <a:t>第四層</a:t>
             </a:r>
           </a:p>
           <a:p>
             <a:pPr lvl="4"/>
             <a:r>
-              <a:rPr lang="zh-TW" altLang="en-US" smtClean="0"/>
+              <a:rPr lang="zh-TW" altLang="en-US"/>
               <a:t>第五層</a:t>
             </a:r>
-            <a:endParaRPr lang="zh-TW" altLang="en-US"/>
           </a:p>
         </p:txBody>
       </p:sp>
@@ -650,7 +644,7 @@
           <a:p>
             <a:fld id="{5B80AD86-2C1E-4B28-87F6-A194458C1C65}" type="datetimeFigureOut">
               <a:rPr lang="zh-TW" altLang="en-US" smtClean="0"/>
-              <a:t>2023/7/7</a:t>
+              <a:t>2024/3/16</a:t>
             </a:fld>
             <a:endParaRPr lang="zh-TW" altLang="en-US"/>
           </a:p>
@@ -739,10 +733,9 @@
           <a:lstStyle/>
           <a:p>
             <a:r>
-              <a:rPr lang="zh-TW" altLang="en-US" smtClean="0"/>
+              <a:rPr lang="zh-TW" altLang="en-US"/>
               <a:t>按一下以編輯母片標題樣式</a:t>
             </a:r>
-            <a:endParaRPr lang="zh-TW" altLang="en-US"/>
           </a:p>
         </p:txBody>
       </p:sp>
@@ -763,38 +756,37 @@
           <a:p>
             <a:pPr lvl="0"/>
             <a:r>
-              <a:rPr lang="zh-TW" altLang="en-US" smtClean="0"/>
+              <a:rPr lang="zh-TW" altLang="en-US"/>
               <a:t>按一下以編輯母片文字樣式</a:t>
             </a:r>
           </a:p>
           <a:p>
             <a:pPr lvl="1"/>
             <a:r>
-              <a:rPr lang="zh-TW" altLang="en-US" smtClean="0"/>
+              <a:rPr lang="zh-TW" altLang="en-US"/>
               <a:t>第二層</a:t>
             </a:r>
           </a:p>
           <a:p>
             <a:pPr lvl="2"/>
             <a:r>
-              <a:rPr lang="zh-TW" altLang="en-US" smtClean="0"/>
+              <a:rPr lang="zh-TW" altLang="en-US"/>
               <a:t>第三層</a:t>
             </a:r>
           </a:p>
           <a:p>
             <a:pPr lvl="3"/>
             <a:r>
-              <a:rPr lang="zh-TW" altLang="en-US" smtClean="0"/>
+              <a:rPr lang="zh-TW" altLang="en-US"/>
               <a:t>第四層</a:t>
             </a:r>
           </a:p>
           <a:p>
             <a:pPr lvl="4"/>
             <a:r>
-              <a:rPr lang="zh-TW" altLang="en-US" smtClean="0"/>
+              <a:rPr lang="zh-TW" altLang="en-US"/>
               <a:t>第五層</a:t>
             </a:r>
-            <a:endParaRPr lang="zh-TW" altLang="en-US"/>
           </a:p>
         </p:txBody>
       </p:sp>
@@ -815,7 +807,7 @@
           <a:p>
             <a:fld id="{5B80AD86-2C1E-4B28-87F6-A194458C1C65}" type="datetimeFigureOut">
               <a:rPr lang="zh-TW" altLang="en-US" smtClean="0"/>
-              <a:t>2023/7/7</a:t>
+              <a:t>2024/3/16</a:t>
             </a:fld>
             <a:endParaRPr lang="zh-TW" altLang="en-US"/>
           </a:p>
@@ -913,10 +905,9 @@
           </a:lstStyle>
           <a:p>
             <a:r>
-              <a:rPr lang="zh-TW" altLang="en-US" smtClean="0"/>
+              <a:rPr lang="zh-TW" altLang="en-US"/>
               <a:t>按一下以編輯母片標題樣式</a:t>
             </a:r>
-            <a:endParaRPr lang="zh-TW" altLang="en-US"/>
           </a:p>
         </p:txBody>
       </p:sp>
@@ -1033,7 +1024,7 @@
           <a:p>
             <a:pPr lvl="0"/>
             <a:r>
-              <a:rPr lang="zh-TW" altLang="en-US" smtClean="0"/>
+              <a:rPr lang="zh-TW" altLang="en-US"/>
               <a:t>按一下以編輯母片文字樣式</a:t>
             </a:r>
           </a:p>
@@ -1056,7 +1047,7 @@
           <a:p>
             <a:fld id="{5B80AD86-2C1E-4B28-87F6-A194458C1C65}" type="datetimeFigureOut">
               <a:rPr lang="zh-TW" altLang="en-US" smtClean="0"/>
-              <a:t>2023/7/7</a:t>
+              <a:t>2024/3/16</a:t>
             </a:fld>
             <a:endParaRPr lang="zh-TW" altLang="en-US"/>
           </a:p>
@@ -1145,10 +1136,9 @@
           <a:lstStyle/>
           <a:p>
             <a:r>
-              <a:rPr lang="zh-TW" altLang="en-US" smtClean="0"/>
+              <a:rPr lang="zh-TW" altLang="en-US"/>
               <a:t>按一下以編輯母片標題樣式</a:t>
             </a:r>
-            <a:endParaRPr lang="zh-TW" altLang="en-US"/>
           </a:p>
         </p:txBody>
       </p:sp>
@@ -1202,38 +1192,37 @@
           <a:p>
             <a:pPr lvl="0"/>
             <a:r>
-              <a:rPr lang="zh-TW" altLang="en-US" smtClean="0"/>
+              <a:rPr lang="zh-TW" altLang="en-US"/>
               <a:t>按一下以編輯母片文字樣式</a:t>
             </a:r>
           </a:p>
           <a:p>
             <a:pPr lvl="1"/>
             <a:r>
-              <a:rPr lang="zh-TW" altLang="en-US" smtClean="0"/>
+              <a:rPr lang="zh-TW" altLang="en-US"/>
               <a:t>第二層</a:t>
             </a:r>
           </a:p>
           <a:p>
             <a:pPr lvl="2"/>
             <a:r>
-              <a:rPr lang="zh-TW" altLang="en-US" smtClean="0"/>
+              <a:rPr lang="zh-TW" altLang="en-US"/>
               <a:t>第三層</a:t>
             </a:r>
           </a:p>
           <a:p>
             <a:pPr lvl="3"/>
             <a:r>
-              <a:rPr lang="zh-TW" altLang="en-US" smtClean="0"/>
+              <a:rPr lang="zh-TW" altLang="en-US"/>
               <a:t>第四層</a:t>
             </a:r>
           </a:p>
           <a:p>
             <a:pPr lvl="4"/>
             <a:r>
-              <a:rPr lang="zh-TW" altLang="en-US" smtClean="0"/>
+              <a:rPr lang="zh-TW" altLang="en-US"/>
               <a:t>第五層</a:t>
             </a:r>
-            <a:endParaRPr lang="zh-TW" altLang="en-US"/>
           </a:p>
         </p:txBody>
       </p:sp>
@@ -1287,38 +1276,37 @@
           <a:p>
             <a:pPr lvl="0"/>
             <a:r>
-              <a:rPr lang="zh-TW" altLang="en-US" smtClean="0"/>
+              <a:rPr lang="zh-TW" altLang="en-US"/>
               <a:t>按一下以編輯母片文字樣式</a:t>
             </a:r>
           </a:p>
           <a:p>
             <a:pPr lvl="1"/>
             <a:r>
-              <a:rPr lang="zh-TW" altLang="en-US" smtClean="0"/>
+              <a:rPr lang="zh-TW" altLang="en-US"/>
               <a:t>第二層</a:t>
             </a:r>
           </a:p>
           <a:p>
             <a:pPr lvl="2"/>
             <a:r>
-              <a:rPr lang="zh-TW" altLang="en-US" smtClean="0"/>
+              <a:rPr lang="zh-TW" altLang="en-US"/>
               <a:t>第三層</a:t>
             </a:r>
           </a:p>
           <a:p>
             <a:pPr lvl="3"/>
             <a:r>
-              <a:rPr lang="zh-TW" altLang="en-US" smtClean="0"/>
+              <a:rPr lang="zh-TW" altLang="en-US"/>
               <a:t>第四層</a:t>
             </a:r>
           </a:p>
           <a:p>
             <a:pPr lvl="4"/>
             <a:r>
-              <a:rPr lang="zh-TW" altLang="en-US" smtClean="0"/>
+              <a:rPr lang="zh-TW" altLang="en-US"/>
               <a:t>第五層</a:t>
             </a:r>
-            <a:endParaRPr lang="zh-TW" altLang="en-US"/>
           </a:p>
         </p:txBody>
       </p:sp>
@@ -1339,7 +1327,7 @@
           <a:p>
             <a:fld id="{5B80AD86-2C1E-4B28-87F6-A194458C1C65}" type="datetimeFigureOut">
               <a:rPr lang="zh-TW" altLang="en-US" smtClean="0"/>
-              <a:t>2023/7/7</a:t>
+              <a:t>2024/3/16</a:t>
             </a:fld>
             <a:endParaRPr lang="zh-TW" altLang="en-US"/>
           </a:p>
@@ -1432,10 +1420,9 @@
           </a:lstStyle>
           <a:p>
             <a:r>
-              <a:rPr lang="zh-TW" altLang="en-US" smtClean="0"/>
+              <a:rPr lang="zh-TW" altLang="en-US"/>
               <a:t>按一下以編輯母片標題樣式</a:t>
             </a:r>
-            <a:endParaRPr lang="zh-TW" altLang="en-US"/>
           </a:p>
         </p:txBody>
       </p:sp>
@@ -1498,7 +1485,7 @@
           <a:p>
             <a:pPr lvl="0"/>
             <a:r>
-              <a:rPr lang="zh-TW" altLang="en-US" smtClean="0"/>
+              <a:rPr lang="zh-TW" altLang="en-US"/>
               <a:t>按一下以編輯母片文字樣式</a:t>
             </a:r>
           </a:p>
@@ -1554,38 +1541,37 @@
           <a:p>
             <a:pPr lvl="0"/>
             <a:r>
-              <a:rPr lang="zh-TW" altLang="en-US" smtClean="0"/>
+              <a:rPr lang="zh-TW" altLang="en-US"/>
               <a:t>按一下以編輯母片文字樣式</a:t>
             </a:r>
           </a:p>
           <a:p>
             <a:pPr lvl="1"/>
             <a:r>
-              <a:rPr lang="zh-TW" altLang="en-US" smtClean="0"/>
+              <a:rPr lang="zh-TW" altLang="en-US"/>
               <a:t>第二層</a:t>
             </a:r>
           </a:p>
           <a:p>
             <a:pPr lvl="2"/>
             <a:r>
-              <a:rPr lang="zh-TW" altLang="en-US" smtClean="0"/>
+              <a:rPr lang="zh-TW" altLang="en-US"/>
               <a:t>第三層</a:t>
             </a:r>
           </a:p>
           <a:p>
             <a:pPr lvl="3"/>
             <a:r>
-              <a:rPr lang="zh-TW" altLang="en-US" smtClean="0"/>
+              <a:rPr lang="zh-TW" altLang="en-US"/>
               <a:t>第四層</a:t>
             </a:r>
           </a:p>
           <a:p>
             <a:pPr lvl="4"/>
             <a:r>
-              <a:rPr lang="zh-TW" altLang="en-US" smtClean="0"/>
+              <a:rPr lang="zh-TW" altLang="en-US"/>
               <a:t>第五層</a:t>
             </a:r>
-            <a:endParaRPr lang="zh-TW" altLang="en-US"/>
           </a:p>
         </p:txBody>
       </p:sp>
@@ -1648,7 +1634,7 @@
           <a:p>
             <a:pPr lvl="0"/>
             <a:r>
-              <a:rPr lang="zh-TW" altLang="en-US" smtClean="0"/>
+              <a:rPr lang="zh-TW" altLang="en-US"/>
               <a:t>按一下以編輯母片文字樣式</a:t>
             </a:r>
           </a:p>
@@ -1704,38 +1690,37 @@
           <a:p>
             <a:pPr lvl="0"/>
             <a:r>
-              <a:rPr lang="zh-TW" altLang="en-US" smtClean="0"/>
+              <a:rPr lang="zh-TW" altLang="en-US"/>
               <a:t>按一下以編輯母片文字樣式</a:t>
             </a:r>
           </a:p>
           <a:p>
             <a:pPr lvl="1"/>
             <a:r>
-              <a:rPr lang="zh-TW" altLang="en-US" smtClean="0"/>
+              <a:rPr lang="zh-TW" altLang="en-US"/>
               <a:t>第二層</a:t>
             </a:r>
           </a:p>
           <a:p>
             <a:pPr lvl="2"/>
             <a:r>
-              <a:rPr lang="zh-TW" altLang="en-US" smtClean="0"/>
+              <a:rPr lang="zh-TW" altLang="en-US"/>
               <a:t>第三層</a:t>
             </a:r>
           </a:p>
           <a:p>
             <a:pPr lvl="3"/>
             <a:r>
-              <a:rPr lang="zh-TW" altLang="en-US" smtClean="0"/>
+              <a:rPr lang="zh-TW" altLang="en-US"/>
               <a:t>第四層</a:t>
             </a:r>
           </a:p>
           <a:p>
             <a:pPr lvl="4"/>
             <a:r>
-              <a:rPr lang="zh-TW" altLang="en-US" smtClean="0"/>
+              <a:rPr lang="zh-TW" altLang="en-US"/>
               <a:t>第五層</a:t>
             </a:r>
-            <a:endParaRPr lang="zh-TW" altLang="en-US"/>
           </a:p>
         </p:txBody>
       </p:sp>
@@ -1756,7 +1741,7 @@
           <a:p>
             <a:fld id="{5B80AD86-2C1E-4B28-87F6-A194458C1C65}" type="datetimeFigureOut">
               <a:rPr lang="zh-TW" altLang="en-US" smtClean="0"/>
-              <a:t>2023/7/7</a:t>
+              <a:t>2024/3/16</a:t>
             </a:fld>
             <a:endParaRPr lang="zh-TW" altLang="en-US"/>
           </a:p>
@@ -1845,10 +1830,9 @@
           <a:lstStyle/>
           <a:p>
             <a:r>
-              <a:rPr lang="zh-TW" altLang="en-US" smtClean="0"/>
+              <a:rPr lang="zh-TW" altLang="en-US"/>
               <a:t>按一下以編輯母片標題樣式</a:t>
             </a:r>
-            <a:endParaRPr lang="zh-TW" altLang="en-US"/>
           </a:p>
         </p:txBody>
       </p:sp>
@@ -1869,7 +1853,7 @@
           <a:p>
             <a:fld id="{5B80AD86-2C1E-4B28-87F6-A194458C1C65}" type="datetimeFigureOut">
               <a:rPr lang="zh-TW" altLang="en-US" smtClean="0"/>
-              <a:t>2023/7/7</a:t>
+              <a:t>2024/3/16</a:t>
             </a:fld>
             <a:endParaRPr lang="zh-TW" altLang="en-US"/>
           </a:p>
@@ -1959,7 +1943,7 @@
           <a:p>
             <a:fld id="{5B80AD86-2C1E-4B28-87F6-A194458C1C65}" type="datetimeFigureOut">
               <a:rPr lang="zh-TW" altLang="en-US" smtClean="0"/>
-              <a:t>2023/7/7</a:t>
+              <a:t>2024/3/16</a:t>
             </a:fld>
             <a:endParaRPr lang="zh-TW" altLang="en-US"/>
           </a:p>
@@ -2057,10 +2041,9 @@
           </a:lstStyle>
           <a:p>
             <a:r>
-              <a:rPr lang="zh-TW" altLang="en-US" smtClean="0"/>
+              <a:rPr lang="zh-TW" altLang="en-US"/>
               <a:t>按一下以編輯母片標題樣式</a:t>
             </a:r>
-            <a:endParaRPr lang="zh-TW" altLang="en-US"/>
           </a:p>
         </p:txBody>
       </p:sp>
@@ -2114,38 +2097,37 @@
           <a:p>
             <a:pPr lvl="0"/>
             <a:r>
-              <a:rPr lang="zh-TW" altLang="en-US" smtClean="0"/>
+              <a:rPr lang="zh-TW" altLang="en-US"/>
               <a:t>按一下以編輯母片文字樣式</a:t>
             </a:r>
           </a:p>
           <a:p>
             <a:pPr lvl="1"/>
             <a:r>
-              <a:rPr lang="zh-TW" altLang="en-US" smtClean="0"/>
+              <a:rPr lang="zh-TW" altLang="en-US"/>
               <a:t>第二層</a:t>
             </a:r>
           </a:p>
           <a:p>
             <a:pPr lvl="2"/>
             <a:r>
-              <a:rPr lang="zh-TW" altLang="en-US" smtClean="0"/>
+              <a:rPr lang="zh-TW" altLang="en-US"/>
               <a:t>第三層</a:t>
             </a:r>
           </a:p>
           <a:p>
             <a:pPr lvl="3"/>
             <a:r>
-              <a:rPr lang="zh-TW" altLang="en-US" smtClean="0"/>
+              <a:rPr lang="zh-TW" altLang="en-US"/>
               <a:t>第四層</a:t>
             </a:r>
           </a:p>
           <a:p>
             <a:pPr lvl="4"/>
             <a:r>
-              <a:rPr lang="zh-TW" altLang="en-US" smtClean="0"/>
+              <a:rPr lang="zh-TW" altLang="en-US"/>
               <a:t>第五層</a:t>
             </a:r>
-            <a:endParaRPr lang="zh-TW" altLang="en-US"/>
           </a:p>
         </p:txBody>
       </p:sp>
@@ -2208,7 +2190,7 @@
           <a:p>
             <a:pPr lvl="0"/>
             <a:r>
-              <a:rPr lang="zh-TW" altLang="en-US" smtClean="0"/>
+              <a:rPr lang="zh-TW" altLang="en-US"/>
               <a:t>按一下以編輯母片文字樣式</a:t>
             </a:r>
           </a:p>
@@ -2231,7 +2213,7 @@
           <a:p>
             <a:fld id="{5B80AD86-2C1E-4B28-87F6-A194458C1C65}" type="datetimeFigureOut">
               <a:rPr lang="zh-TW" altLang="en-US" smtClean="0"/>
-              <a:t>2023/7/7</a:t>
+              <a:t>2024/3/16</a:t>
             </a:fld>
             <a:endParaRPr lang="zh-TW" altLang="en-US"/>
           </a:p>
@@ -2329,10 +2311,9 @@
           </a:lstStyle>
           <a:p>
             <a:r>
-              <a:rPr lang="zh-TW" altLang="en-US" smtClean="0"/>
+              <a:rPr lang="zh-TW" altLang="en-US"/>
               <a:t>按一下以編輯母片標題樣式</a:t>
             </a:r>
-            <a:endParaRPr lang="zh-TW" altLang="en-US"/>
           </a:p>
         </p:txBody>
       </p:sp>
@@ -2394,10 +2375,9 @@
           </a:lstStyle>
           <a:p>
             <a:r>
-              <a:rPr lang="zh-TW" altLang="en-US" smtClean="0"/>
+              <a:rPr lang="zh-TW" altLang="en-US"/>
               <a:t>按一下圖示以新增圖片</a:t>
             </a:r>
-            <a:endParaRPr lang="zh-TW" altLang="en-US"/>
           </a:p>
         </p:txBody>
       </p:sp>
@@ -2460,7 +2440,7 @@
           <a:p>
             <a:pPr lvl="0"/>
             <a:r>
-              <a:rPr lang="zh-TW" altLang="en-US" smtClean="0"/>
+              <a:rPr lang="zh-TW" altLang="en-US"/>
               <a:t>按一下以編輯母片文字樣式</a:t>
             </a:r>
           </a:p>
@@ -2483,7 +2463,7 @@
           <a:p>
             <a:fld id="{5B80AD86-2C1E-4B28-87F6-A194458C1C65}" type="datetimeFigureOut">
               <a:rPr lang="zh-TW" altLang="en-US" smtClean="0"/>
-              <a:t>2023/7/7</a:t>
+              <a:t>2024/3/16</a:t>
             </a:fld>
             <a:endParaRPr lang="zh-TW" altLang="en-US"/>
           </a:p>
@@ -2592,10 +2572,9 @@
           <a:lstStyle/>
           <a:p>
             <a:r>
-              <a:rPr lang="zh-TW" altLang="en-US" smtClean="0"/>
+              <a:rPr lang="zh-TW" altLang="en-US"/>
               <a:t>按一下以編輯母片標題樣式</a:t>
             </a:r>
-            <a:endParaRPr lang="zh-TW" altLang="en-US"/>
           </a:p>
         </p:txBody>
       </p:sp>
@@ -2626,38 +2605,37 @@
           <a:p>
             <a:pPr lvl="0"/>
             <a:r>
-              <a:rPr lang="zh-TW" altLang="en-US" smtClean="0"/>
+              <a:rPr lang="zh-TW" altLang="en-US"/>
               <a:t>按一下以編輯母片文字樣式</a:t>
             </a:r>
           </a:p>
           <a:p>
             <a:pPr lvl="1"/>
             <a:r>
-              <a:rPr lang="zh-TW" altLang="en-US" smtClean="0"/>
+              <a:rPr lang="zh-TW" altLang="en-US"/>
               <a:t>第二層</a:t>
             </a:r>
           </a:p>
           <a:p>
             <a:pPr lvl="2"/>
             <a:r>
-              <a:rPr lang="zh-TW" altLang="en-US" smtClean="0"/>
+              <a:rPr lang="zh-TW" altLang="en-US"/>
               <a:t>第三層</a:t>
             </a:r>
           </a:p>
           <a:p>
             <a:pPr lvl="3"/>
             <a:r>
-              <a:rPr lang="zh-TW" altLang="en-US" smtClean="0"/>
+              <a:rPr lang="zh-TW" altLang="en-US"/>
               <a:t>第四層</a:t>
             </a:r>
           </a:p>
           <a:p>
             <a:pPr lvl="4"/>
             <a:r>
-              <a:rPr lang="zh-TW" altLang="en-US" smtClean="0"/>
+              <a:rPr lang="zh-TW" altLang="en-US"/>
               <a:t>第五層</a:t>
             </a:r>
-            <a:endParaRPr lang="zh-TW" altLang="en-US"/>
           </a:p>
         </p:txBody>
       </p:sp>
@@ -2696,7 +2674,7 @@
           <a:p>
             <a:fld id="{5B80AD86-2C1E-4B28-87F6-A194458C1C65}" type="datetimeFigureOut">
               <a:rPr lang="zh-TW" altLang="en-US" smtClean="0"/>
-              <a:t>2023/7/7</a:t>
+              <a:t>2024/3/16</a:t>
             </a:fld>
             <a:endParaRPr lang="zh-TW" altLang="en-US"/>
           </a:p>
@@ -3089,7 +3067,7 @@
           <a:lstStyle/>
           <a:p>
             <a:r>
-              <a:rPr lang="zh-TW" altLang="en-US" sz="5400" b="1" i="1" dirty="0" smtClean="0">
+              <a:rPr lang="zh-TW" altLang="en-US" sz="5400" b="1" i="1" dirty="0">
                 <a:solidFill>
                   <a:srgbClr val="660033"/>
                 </a:solidFill>
@@ -3103,58 +3081,7 @@
                 <a:latin typeface="微軟正黑體" pitchFamily="34" charset="-120"/>
                 <a:ea typeface="微軟正黑體" pitchFamily="34" charset="-120"/>
               </a:rPr>
-              <a:t>彈</a:t>
-            </a:r>
-            <a:r>
-              <a:rPr lang="zh-TW" altLang="en-US" sz="5400" b="1" i="1" dirty="0">
-                <a:solidFill>
-                  <a:srgbClr val="660033"/>
-                </a:solidFill>
-                <a:effectLst>
-                  <a:outerShdw blurRad="38100" dist="38100" dir="2700000" algn="tl">
-                    <a:srgbClr val="000000">
-                      <a:alpha val="43137"/>
-                    </a:srgbClr>
-                  </a:outerShdw>
-                </a:effectLst>
-                <a:latin typeface="微軟正黑體" pitchFamily="34" charset="-120"/>
-                <a:ea typeface="微軟正黑體" pitchFamily="34" charset="-120"/>
-              </a:rPr>
-              <a:t>琴歌唱讚</a:t>
-            </a:r>
-            <a:r>
-              <a:rPr lang="zh-TW" altLang="en-US" sz="5400" b="1" i="1" dirty="0">
-                <a:solidFill>
-                  <a:srgbClr val="660033"/>
-                </a:solidFill>
-                <a:effectLst>
-                  <a:outerShdw blurRad="38100" dist="38100" dir="2700000" algn="tl">
-                    <a:srgbClr val="000000">
-                      <a:alpha val="43137"/>
-                    </a:srgbClr>
-                  </a:outerShdw>
-                </a:effectLst>
-                <a:latin typeface="微軟正黑體" pitchFamily="34" charset="-120"/>
-                <a:ea typeface="微軟正黑體" pitchFamily="34" charset="-120"/>
-              </a:rPr>
-              <a:t>美</a:t>
-            </a:r>
-            <a:r>
-              <a:rPr lang="zh-TW" altLang="en-US" sz="5400" b="1" i="1" dirty="0">
-                <a:solidFill>
-                  <a:srgbClr val="660033"/>
-                </a:solidFill>
-                <a:effectLst>
-                  <a:outerShdw blurRad="38100" dist="38100" dir="2700000" algn="tl">
-                    <a:srgbClr val="000000">
-                      <a:alpha val="43137"/>
-                    </a:srgbClr>
-                  </a:outerShdw>
-                </a:effectLst>
-                <a:latin typeface="微軟正黑體" pitchFamily="34" charset="-120"/>
-                <a:ea typeface="微軟正黑體" pitchFamily="34" charset="-120"/>
-              </a:rPr>
-              <a:t>祢</a:t>
+              <a:t>彈琴歌唱讚美祢</a:t>
             </a:r>
           </a:p>
         </p:txBody>
@@ -3215,64 +3142,14 @@
               <a:buNone/>
             </a:pPr>
             <a:r>
-              <a:rPr lang="zh-TW" altLang="en-US" sz="4800" b="1" dirty="0" smtClean="0">
+              <a:rPr lang="zh-TW" altLang="en-US" sz="4800" b="1" dirty="0">
                 <a:solidFill>
                   <a:srgbClr val="660033"/>
                 </a:solidFill>
                 <a:latin typeface="微軟正黑體" pitchFamily="34" charset="-120"/>
                 <a:ea typeface="微軟正黑體" pitchFamily="34" charset="-120"/>
               </a:rPr>
-              <a:t>我</a:t>
-            </a:r>
-            <a:r>
-              <a:rPr lang="zh-TW" altLang="en-US" sz="4800" b="1" dirty="0">
-                <a:solidFill>
-                  <a:srgbClr val="660033"/>
-                </a:solidFill>
-                <a:latin typeface="微軟正黑體" pitchFamily="34" charset="-120"/>
-                <a:ea typeface="微軟正黑體" pitchFamily="34" charset="-120"/>
-              </a:rPr>
-              <a:t>要彈琴</a:t>
-            </a:r>
-            <a:r>
-              <a:rPr lang="zh-TW" altLang="en-US" sz="4800" b="1" dirty="0">
-                <a:solidFill>
-                  <a:srgbClr val="660033"/>
-                </a:solidFill>
-                <a:latin typeface="微軟正黑體" pitchFamily="34" charset="-120"/>
-                <a:ea typeface="微軟正黑體" pitchFamily="34" charset="-120"/>
-              </a:rPr>
-              <a:t>歌唱稱</a:t>
-            </a:r>
-            <a:r>
-              <a:rPr lang="zh-TW" altLang="en-US" sz="4800" b="1" dirty="0">
-                <a:solidFill>
-                  <a:srgbClr val="660033"/>
-                </a:solidFill>
-                <a:latin typeface="微軟正黑體" pitchFamily="34" charset="-120"/>
-                <a:ea typeface="微軟正黑體" pitchFamily="34" charset="-120"/>
-              </a:rPr>
-              <a:t>頌</a:t>
-            </a:r>
-            <a:r>
-              <a:rPr lang="zh-TW" altLang="en-US" sz="4800" b="1" dirty="0">
-                <a:solidFill>
-                  <a:srgbClr val="660033"/>
-                </a:solidFill>
-                <a:latin typeface="微軟正黑體" pitchFamily="34" charset="-120"/>
-                <a:ea typeface="微軟正黑體" pitchFamily="34" charset="-120"/>
-              </a:rPr>
-              <a:t>祢</a:t>
-            </a:r>
-            <a:r>
-              <a:rPr lang="zh-TW" altLang="en-US" sz="4800" b="1" dirty="0">
-                <a:solidFill>
-                  <a:srgbClr val="660033"/>
-                </a:solidFill>
-                <a:latin typeface="微軟正黑體" pitchFamily="34" charset="-120"/>
-                <a:ea typeface="微軟正黑體" pitchFamily="34" charset="-120"/>
-              </a:rPr>
-              <a:t>名</a:t>
+              <a:t>我要彈琴歌唱稱頌祢名</a:t>
             </a:r>
             <a:endParaRPr lang="en-US" altLang="zh-TW" sz="4800" b="1" dirty="0">
               <a:solidFill>
@@ -3294,47 +3171,7 @@
                 <a:latin typeface="微軟正黑體" pitchFamily="34" charset="-120"/>
                 <a:ea typeface="微軟正黑體" pitchFamily="34" charset="-120"/>
               </a:rPr>
-              <a:t>因</a:t>
-            </a:r>
-            <a:r>
-              <a:rPr lang="zh-TW" altLang="en-US" sz="4800" b="1" dirty="0" smtClean="0">
-                <a:solidFill>
-                  <a:srgbClr val="660033"/>
-                </a:solidFill>
-                <a:latin typeface="微軟正黑體" pitchFamily="34" charset="-120"/>
-                <a:ea typeface="微軟正黑體" pitchFamily="34" charset="-120"/>
-              </a:rPr>
-              <a:t>為</a:t>
-            </a:r>
-            <a:r>
-              <a:rPr lang="zh-TW" altLang="en-US" sz="4800" b="1" dirty="0">
-                <a:solidFill>
-                  <a:srgbClr val="660033"/>
-                </a:solidFill>
-                <a:latin typeface="微軟正黑體" pitchFamily="34" charset="-120"/>
-                <a:ea typeface="微軟正黑體" pitchFamily="34" charset="-120"/>
-              </a:rPr>
-              <a:t>祢</a:t>
-            </a:r>
-            <a:r>
-              <a:rPr lang="zh-TW" altLang="en-US" sz="4800" b="1" dirty="0" smtClean="0">
-                <a:solidFill>
-                  <a:srgbClr val="660033"/>
-                </a:solidFill>
-                <a:latin typeface="微軟正黑體" pitchFamily="34" charset="-120"/>
-                <a:ea typeface="微軟正黑體" pitchFamily="34" charset="-120"/>
-              </a:rPr>
-              <a:t>大</a:t>
-            </a:r>
-            <a:r>
-              <a:rPr lang="zh-TW" altLang="en-US" sz="4800" b="1" dirty="0">
-                <a:solidFill>
-                  <a:srgbClr val="660033"/>
-                </a:solidFill>
-                <a:latin typeface="微軟正黑體" pitchFamily="34" charset="-120"/>
-                <a:ea typeface="微軟正黑體" pitchFamily="34" charset="-120"/>
-              </a:rPr>
-              <a:t>作為真奇妙</a:t>
+              <a:t>因為祢大作為真奇妙</a:t>
             </a:r>
             <a:endParaRPr lang="en-US" altLang="zh-TW" sz="4800" b="1" dirty="0">
               <a:solidFill>
@@ -3354,8 +3191,8 @@
         </p:nvSpPr>
         <p:spPr>
           <a:xfrm>
-            <a:off x="0" y="3939902"/>
-            <a:ext cx="9144000" cy="646331"/>
+            <a:off x="0" y="4001457"/>
+            <a:ext cx="9144000" cy="523220"/>
           </a:xfrm>
           <a:prstGeom prst="rect">
             <a:avLst/>
@@ -3370,7 +3207,7 @@
           <a:p>
             <a:pPr algn="ctr"/>
             <a:r>
-              <a:rPr lang="en-US" sz="3600" b="1" dirty="0">
+              <a:rPr lang="en-US" sz="2800" b="1" dirty="0">
                 <a:solidFill>
                   <a:srgbClr val="660033"/>
                 </a:solidFill>
@@ -3381,7 +3218,7 @@
               <a:t>( </a:t>
             </a:r>
             <a:r>
-              <a:rPr lang="zh-CN" altLang="en-US" sz="3600" b="1" dirty="0">
+              <a:rPr lang="zh-CN" altLang="en-US" sz="2800" b="1" dirty="0">
                 <a:solidFill>
                   <a:srgbClr val="660033"/>
                 </a:solidFill>
@@ -3389,10 +3226,10 @@
                 <a:latin typeface="Microsoft JhengHei" panose="020B0604030504040204" pitchFamily="34" charset="-120"/>
                 <a:ea typeface="Microsoft JhengHei" panose="020B0604030504040204" pitchFamily="34" charset="-120"/>
               </a:rPr>
-              <a:t>正</a:t>
-            </a:r>
-            <a:r>
-              <a:rPr lang="en-US" sz="3600" b="1" dirty="0">
+              <a:t>正歌</a:t>
+            </a:r>
+            <a:r>
+              <a:rPr lang="en-US" sz="2800" b="1" dirty="0">
                 <a:solidFill>
                   <a:srgbClr val="660033"/>
                 </a:solidFill>
@@ -3402,7 +3239,7 @@
               </a:rPr>
               <a:t> )</a:t>
             </a:r>
-            <a:endParaRPr lang="vi-VN" sz="3600" b="1" dirty="0">
+            <a:endParaRPr lang="vi-VN" sz="2800" b="1" dirty="0">
               <a:solidFill>
                 <a:srgbClr val="660033"/>
               </a:solidFill>
@@ -3476,27 +3313,7 @@
                 <a:latin typeface="微軟正黑體" pitchFamily="34" charset="-120"/>
                 <a:ea typeface="微軟正黑體" pitchFamily="34" charset="-120"/>
               </a:rPr>
-              <a:t>全地啊   當揚聲述</a:t>
-            </a:r>
-            <a:r>
-              <a:rPr lang="zh-TW" altLang="en-US" sz="4800" b="1" dirty="0">
-                <a:solidFill>
-                  <a:srgbClr val="660033"/>
-                </a:solidFill>
-                <a:latin typeface="微軟正黑體" pitchFamily="34" charset="-120"/>
-                <a:ea typeface="微軟正黑體" pitchFamily="34" charset="-120"/>
-              </a:rPr>
-              <a:t>說祢的</a:t>
-            </a:r>
-            <a:r>
-              <a:rPr lang="zh-TW" altLang="en-US" sz="4800" b="1" dirty="0">
-                <a:solidFill>
-                  <a:srgbClr val="660033"/>
-                </a:solidFill>
-                <a:latin typeface="微軟正黑體" pitchFamily="34" charset="-120"/>
-                <a:ea typeface="微軟正黑體" pitchFamily="34" charset="-120"/>
-              </a:rPr>
-              <a:t>榮耀</a:t>
+              <a:t>全地啊   當揚聲述說祢的榮耀</a:t>
             </a:r>
             <a:endParaRPr lang="en-US" altLang="zh-TW" sz="4800" b="1" dirty="0">
               <a:solidFill>
@@ -3518,25 +3335,8 @@
                 <a:latin typeface="微軟正黑體" pitchFamily="34" charset="-120"/>
                 <a:ea typeface="微軟正黑體" pitchFamily="34" charset="-120"/>
               </a:rPr>
-              <a:t>全心來讚</a:t>
-            </a:r>
-            <a:r>
-              <a:rPr lang="zh-TW" altLang="en-US" sz="4800" b="1" dirty="0">
-                <a:solidFill>
-                  <a:srgbClr val="660033"/>
-                </a:solidFill>
-                <a:latin typeface="微軟正黑體" pitchFamily="34" charset="-120"/>
-                <a:ea typeface="微軟正黑體" pitchFamily="34" charset="-120"/>
-              </a:rPr>
-              <a:t>美祢</a:t>
-            </a:r>
-            <a:endParaRPr lang="zh-TW" altLang="en-US" sz="4800" b="1" dirty="0">
-              <a:solidFill>
-                <a:srgbClr val="660033"/>
-              </a:solidFill>
-              <a:latin typeface="微軟正黑體" pitchFamily="34" charset="-120"/>
-              <a:ea typeface="微軟正黑體" pitchFamily="34" charset="-120"/>
-            </a:endParaRPr>
+              <a:t>全心來讚美祢</a:t>
+            </a:r>
           </a:p>
         </p:txBody>
       </p:sp>
@@ -3548,8 +3348,8 @@
         </p:nvSpPr>
         <p:spPr>
           <a:xfrm>
-            <a:off x="0" y="3939902"/>
-            <a:ext cx="9144000" cy="646331"/>
+            <a:off x="0" y="4001457"/>
+            <a:ext cx="9144000" cy="523220"/>
           </a:xfrm>
           <a:prstGeom prst="rect">
             <a:avLst/>
@@ -3564,44 +3364,39 @@
           <a:p>
             <a:pPr algn="ctr"/>
             <a:r>
-              <a:rPr lang="en-US" sz="3600" b="1" dirty="0">
+              <a:rPr lang="en-US" sz="2800" b="1" dirty="0">
                 <a:solidFill>
                   <a:srgbClr val="660033"/>
                 </a:solidFill>
-                <a:effectLst/>
                 <a:latin typeface="Microsoft JhengHei" panose="020B0604030504040204" pitchFamily="34" charset="-120"/>
                 <a:ea typeface="Microsoft JhengHei" panose="020B0604030504040204" pitchFamily="34" charset="-120"/>
               </a:rPr>
               <a:t>( </a:t>
             </a:r>
             <a:r>
-              <a:rPr lang="zh-CN" altLang="en-US" sz="3600" b="1" dirty="0">
+              <a:rPr lang="zh-CN" altLang="en-US" sz="2800" b="1" dirty="0">
                 <a:solidFill>
                   <a:srgbClr val="660033"/>
                 </a:solidFill>
-                <a:effectLst/>
                 <a:latin typeface="Microsoft JhengHei" panose="020B0604030504040204" pitchFamily="34" charset="-120"/>
                 <a:ea typeface="Microsoft JhengHei" panose="020B0604030504040204" pitchFamily="34" charset="-120"/>
               </a:rPr>
-              <a:t>正</a:t>
-            </a:r>
-            <a:r>
-              <a:rPr lang="en-US" sz="3600" b="1" dirty="0">
+              <a:t>正歌</a:t>
+            </a:r>
+            <a:r>
+              <a:rPr lang="en-US" sz="2800" b="1" dirty="0">
                 <a:solidFill>
                   <a:srgbClr val="660033"/>
                 </a:solidFill>
-                <a:effectLst/>
                 <a:latin typeface="Microsoft JhengHei" panose="020B0604030504040204" pitchFamily="34" charset="-120"/>
                 <a:ea typeface="Microsoft JhengHei" panose="020B0604030504040204" pitchFamily="34" charset="-120"/>
               </a:rPr>
               <a:t> )</a:t>
             </a:r>
-            <a:endParaRPr lang="vi-VN" sz="3600" b="1" dirty="0">
+            <a:endParaRPr lang="vi-VN" sz="2800" b="1" dirty="0">
               <a:solidFill>
                 <a:srgbClr val="660033"/>
               </a:solidFill>
-              <a:effectLst/>
-              <a:latin typeface="Microsoft JhengHei" panose="020B0604030504040204" pitchFamily="34" charset="-120"/>
               <a:ea typeface="Microsoft JhengHei" panose="020B0604030504040204" pitchFamily="34" charset="-120"/>
             </a:endParaRPr>
           </a:p>
@@ -3670,27 +3465,7 @@
                 <a:latin typeface="微軟正黑體" pitchFamily="34" charset="-120"/>
                 <a:ea typeface="微軟正黑體" pitchFamily="34" charset="-120"/>
               </a:rPr>
-              <a:t>擊鼓跳舞  </a:t>
-            </a:r>
-            <a:r>
-              <a:rPr lang="zh-TW" altLang="en-US" sz="4800" b="1" dirty="0" smtClean="0">
-                <a:solidFill>
-                  <a:srgbClr val="660033"/>
-                </a:solidFill>
-                <a:latin typeface="微軟正黑體" pitchFamily="34" charset="-120"/>
-                <a:ea typeface="微軟正黑體" pitchFamily="34" charset="-120"/>
-              </a:rPr>
-              <a:t> 彈</a:t>
-            </a:r>
-            <a:r>
-              <a:rPr lang="zh-TW" altLang="en-US" sz="4800" b="1" dirty="0">
-                <a:solidFill>
-                  <a:srgbClr val="660033"/>
-                </a:solidFill>
-                <a:latin typeface="微軟正黑體" pitchFamily="34" charset="-120"/>
-                <a:ea typeface="微軟正黑體" pitchFamily="34" charset="-120"/>
-              </a:rPr>
-              <a:t>各樣樂器</a:t>
+              <a:t>擊鼓跳舞   彈各樣樂器</a:t>
             </a:r>
             <a:endParaRPr lang="en-US" altLang="zh-TW" sz="4800" b="1" dirty="0">
               <a:solidFill>
@@ -3712,27 +3487,7 @@
                 <a:latin typeface="微軟正黑體" pitchFamily="34" charset="-120"/>
                 <a:ea typeface="微軟正黑體" pitchFamily="34" charset="-120"/>
               </a:rPr>
-              <a:t>來拍掌  </a:t>
-            </a:r>
-            <a:r>
-              <a:rPr lang="zh-TW" altLang="en-US" sz="4800" b="1" dirty="0" smtClean="0">
-                <a:solidFill>
-                  <a:srgbClr val="660033"/>
-                </a:solidFill>
-                <a:latin typeface="微軟正黑體" pitchFamily="34" charset="-120"/>
-                <a:ea typeface="微軟正黑體" pitchFamily="34" charset="-120"/>
-              </a:rPr>
-              <a:t> 穹</a:t>
-            </a:r>
-            <a:r>
-              <a:rPr lang="zh-TW" altLang="en-US" sz="4800" b="1" dirty="0">
-                <a:solidFill>
-                  <a:srgbClr val="660033"/>
-                </a:solidFill>
-                <a:latin typeface="微軟正黑體" pitchFamily="34" charset="-120"/>
-                <a:ea typeface="微軟正黑體" pitchFamily="34" charset="-120"/>
-              </a:rPr>
-              <a:t>蒼起唱和</a:t>
+              <a:t>來拍掌   穹蒼起唱和</a:t>
             </a:r>
           </a:p>
         </p:txBody>
@@ -3745,8 +3500,8 @@
         </p:nvSpPr>
         <p:spPr>
           <a:xfrm>
-            <a:off x="0" y="3939902"/>
-            <a:ext cx="9144000" cy="646331"/>
+            <a:off x="0" y="4001457"/>
+            <a:ext cx="9144000" cy="523220"/>
           </a:xfrm>
           <a:prstGeom prst="rect">
             <a:avLst/>
@@ -3761,44 +3516,39 @@
           <a:p>
             <a:pPr algn="ctr"/>
             <a:r>
-              <a:rPr lang="en-US" sz="3600" b="1" dirty="0">
+              <a:rPr lang="en-US" sz="2800" b="1" dirty="0">
                 <a:solidFill>
                   <a:srgbClr val="660033"/>
                 </a:solidFill>
-                <a:effectLst/>
                 <a:latin typeface="Microsoft JhengHei" panose="020B0604030504040204" pitchFamily="34" charset="-120"/>
                 <a:ea typeface="Microsoft JhengHei" panose="020B0604030504040204" pitchFamily="34" charset="-120"/>
               </a:rPr>
               <a:t>( </a:t>
             </a:r>
             <a:r>
-              <a:rPr lang="zh-CN" altLang="en-US" sz="3600" b="1" dirty="0">
+              <a:rPr lang="zh-CN" altLang="en-US" sz="2800" b="1" dirty="0">
                 <a:solidFill>
                   <a:srgbClr val="660033"/>
                 </a:solidFill>
-                <a:effectLst/>
                 <a:latin typeface="Microsoft JhengHei" panose="020B0604030504040204" pitchFamily="34" charset="-120"/>
                 <a:ea typeface="Microsoft JhengHei" panose="020B0604030504040204" pitchFamily="34" charset="-120"/>
               </a:rPr>
-              <a:t>正</a:t>
-            </a:r>
-            <a:r>
-              <a:rPr lang="en-US" sz="3600" b="1" dirty="0">
+              <a:t>正歌</a:t>
+            </a:r>
+            <a:r>
+              <a:rPr lang="en-US" sz="2800" b="1" dirty="0">
                 <a:solidFill>
                   <a:srgbClr val="660033"/>
                 </a:solidFill>
-                <a:effectLst/>
                 <a:latin typeface="Microsoft JhengHei" panose="020B0604030504040204" pitchFamily="34" charset="-120"/>
                 <a:ea typeface="Microsoft JhengHei" panose="020B0604030504040204" pitchFamily="34" charset="-120"/>
               </a:rPr>
               <a:t> )</a:t>
             </a:r>
-            <a:endParaRPr lang="vi-VN" sz="3600" b="1" dirty="0">
+            <a:endParaRPr lang="vi-VN" sz="2800" b="1" dirty="0">
               <a:solidFill>
                 <a:srgbClr val="660033"/>
               </a:solidFill>
-              <a:effectLst/>
-              <a:latin typeface="Microsoft JhengHei" panose="020B0604030504040204" pitchFamily="34" charset="-120"/>
               <a:ea typeface="Microsoft JhengHei" panose="020B0604030504040204" pitchFamily="34" charset="-120"/>
             </a:endParaRPr>
           </a:p>
@@ -3902,8 +3652,8 @@
         </p:nvSpPr>
         <p:spPr>
           <a:xfrm>
-            <a:off x="0" y="3939902"/>
-            <a:ext cx="9144000" cy="646331"/>
+            <a:off x="0" y="4001457"/>
+            <a:ext cx="9144000" cy="523220"/>
           </a:xfrm>
           <a:prstGeom prst="rect">
             <a:avLst/>
@@ -3918,44 +3668,39 @@
           <a:p>
             <a:pPr algn="ctr"/>
             <a:r>
-              <a:rPr lang="en-US" sz="3600" b="1" dirty="0">
+              <a:rPr lang="en-US" sz="2800" b="1" dirty="0">
                 <a:solidFill>
                   <a:srgbClr val="660033"/>
                 </a:solidFill>
-                <a:effectLst/>
                 <a:latin typeface="Microsoft JhengHei" panose="020B0604030504040204" pitchFamily="34" charset="-120"/>
                 <a:ea typeface="Microsoft JhengHei" panose="020B0604030504040204" pitchFamily="34" charset="-120"/>
               </a:rPr>
               <a:t>( </a:t>
             </a:r>
             <a:r>
-              <a:rPr lang="zh-CN" altLang="en-US" sz="3600" b="1" dirty="0">
+              <a:rPr lang="zh-CN" altLang="en-US" sz="2800" b="1" dirty="0">
                 <a:solidFill>
                   <a:srgbClr val="660033"/>
                 </a:solidFill>
-                <a:effectLst/>
                 <a:latin typeface="Microsoft JhengHei" panose="020B0604030504040204" pitchFamily="34" charset="-120"/>
                 <a:ea typeface="Microsoft JhengHei" panose="020B0604030504040204" pitchFamily="34" charset="-120"/>
               </a:rPr>
-              <a:t>正</a:t>
-            </a:r>
-            <a:r>
-              <a:rPr lang="en-US" sz="3600" b="1" dirty="0">
+              <a:t>正歌</a:t>
+            </a:r>
+            <a:r>
+              <a:rPr lang="en-US" sz="2800" b="1" dirty="0">
                 <a:solidFill>
                   <a:srgbClr val="660033"/>
                 </a:solidFill>
-                <a:effectLst/>
                 <a:latin typeface="Microsoft JhengHei" panose="020B0604030504040204" pitchFamily="34" charset="-120"/>
                 <a:ea typeface="Microsoft JhengHei" panose="020B0604030504040204" pitchFamily="34" charset="-120"/>
               </a:rPr>
               <a:t> )</a:t>
             </a:r>
-            <a:endParaRPr lang="vi-VN" sz="3600" b="1" dirty="0">
+            <a:endParaRPr lang="vi-VN" sz="2800" b="1" dirty="0">
               <a:solidFill>
                 <a:srgbClr val="660033"/>
               </a:solidFill>
-              <a:effectLst/>
-              <a:latin typeface="Microsoft JhengHei" panose="020B0604030504040204" pitchFamily="34" charset="-120"/>
               <a:ea typeface="Microsoft JhengHei" panose="020B0604030504040204" pitchFamily="34" charset="-120"/>
             </a:endParaRPr>
           </a:p>
@@ -4066,8 +3811,8 @@
         </p:nvSpPr>
         <p:spPr>
           <a:xfrm>
-            <a:off x="0" y="3939902"/>
-            <a:ext cx="9144000" cy="646331"/>
+            <a:off x="0" y="4001457"/>
+            <a:ext cx="9144000" cy="523220"/>
           </a:xfrm>
           <a:prstGeom prst="rect">
             <a:avLst/>
@@ -4082,55 +3827,39 @@
           <a:p>
             <a:pPr algn="ctr"/>
             <a:r>
-              <a:rPr lang="en-US" sz="3600" b="1" dirty="0">
+              <a:rPr lang="en-US" sz="2800" b="1" dirty="0">
                 <a:solidFill>
                   <a:srgbClr val="660033"/>
                 </a:solidFill>
-                <a:effectLst/>
                 <a:latin typeface="Microsoft JhengHei" panose="020B0604030504040204" pitchFamily="34" charset="-120"/>
                 <a:ea typeface="Microsoft JhengHei" panose="020B0604030504040204" pitchFamily="34" charset="-120"/>
               </a:rPr>
               <a:t>( </a:t>
             </a:r>
             <a:r>
-              <a:rPr lang="zh-CN" altLang="en-US" sz="3600" b="1" dirty="0" smtClean="0">
+              <a:rPr lang="zh-CN" altLang="en-US" sz="2800" b="1" dirty="0">
                 <a:solidFill>
                   <a:srgbClr val="660033"/>
                 </a:solidFill>
-                <a:effectLst/>
                 <a:latin typeface="Microsoft JhengHei" panose="020B0604030504040204" pitchFamily="34" charset="-120"/>
                 <a:ea typeface="Microsoft JhengHei" panose="020B0604030504040204" pitchFamily="34" charset="-120"/>
               </a:rPr>
-              <a:t>副</a:t>
-            </a:r>
-            <a:r>
-              <a:rPr lang="en-US" sz="3600" b="1" dirty="0" smtClean="0">
+              <a:t>副歌</a:t>
+            </a:r>
+            <a:r>
+              <a:rPr lang="en-US" sz="2800" b="1" dirty="0">
                 <a:solidFill>
                   <a:srgbClr val="660033"/>
                 </a:solidFill>
-                <a:effectLst/>
                 <a:latin typeface="Microsoft JhengHei" panose="020B0604030504040204" pitchFamily="34" charset="-120"/>
                 <a:ea typeface="Microsoft JhengHei" panose="020B0604030504040204" pitchFamily="34" charset="-120"/>
               </a:rPr>
-              <a:t> </a:t>
-            </a:r>
-            <a:r>
-              <a:rPr lang="en-US" sz="3600" b="1" dirty="0">
-                <a:solidFill>
-                  <a:srgbClr val="660033"/>
-                </a:solidFill>
-                <a:effectLst/>
-                <a:latin typeface="Microsoft JhengHei" panose="020B0604030504040204" pitchFamily="34" charset="-120"/>
-                <a:ea typeface="Microsoft JhengHei" panose="020B0604030504040204" pitchFamily="34" charset="-120"/>
-              </a:rPr>
-              <a:t>)</a:t>
-            </a:r>
-            <a:endParaRPr lang="vi-VN" sz="3600" b="1" dirty="0">
+              <a:t> )</a:t>
+            </a:r>
+            <a:endParaRPr lang="vi-VN" sz="2800" b="1" dirty="0">
               <a:solidFill>
                 <a:srgbClr val="660033"/>
               </a:solidFill>
-              <a:effectLst/>
-              <a:latin typeface="Microsoft JhengHei" panose="020B0604030504040204" pitchFamily="34" charset="-120"/>
               <a:ea typeface="Microsoft JhengHei" panose="020B0604030504040204" pitchFamily="34" charset="-120"/>
             </a:endParaRPr>
           </a:p>
@@ -4199,37 +3928,7 @@
                 <a:latin typeface="微軟正黑體" pitchFamily="34" charset="-120"/>
                 <a:ea typeface="微軟正黑體" pitchFamily="34" charset="-120"/>
               </a:rPr>
-              <a:t>哈利路</a:t>
-            </a:r>
-            <a:r>
-              <a:rPr lang="zh-TW" altLang="en-US" sz="4800" b="1" dirty="0" smtClean="0">
-                <a:solidFill>
-                  <a:srgbClr val="660033"/>
-                </a:solidFill>
-                <a:latin typeface="微軟正黑體" pitchFamily="34" charset="-120"/>
-                <a:ea typeface="微軟正黑體" pitchFamily="34" charset="-120"/>
-              </a:rPr>
-              <a:t>亞  主</a:t>
-            </a:r>
-            <a:r>
-              <a:rPr lang="zh-TW" altLang="en-US" sz="4800" b="1" dirty="0">
-                <a:solidFill>
-                  <a:srgbClr val="660033"/>
-                </a:solidFill>
-                <a:latin typeface="微軟正黑體" pitchFamily="34" charset="-120"/>
-                <a:ea typeface="微軟正黑體" pitchFamily="34" charset="-120"/>
-              </a:rPr>
-              <a:t>我稱</a:t>
-            </a:r>
-            <a:r>
-              <a:rPr lang="zh-TW" altLang="en-US" sz="4800" b="1" dirty="0">
-                <a:solidFill>
-                  <a:srgbClr val="660033"/>
-                </a:solidFill>
-                <a:latin typeface="微軟正黑體" pitchFamily="34" charset="-120"/>
-                <a:ea typeface="微軟正黑體" pitchFamily="34" charset="-120"/>
-              </a:rPr>
-              <a:t>頌祢</a:t>
+              <a:t>哈利路亞  主我稱頌祢</a:t>
             </a:r>
             <a:endParaRPr lang="en-US" altLang="zh-TW" sz="4800" b="1" dirty="0">
               <a:solidFill>
@@ -4251,37 +3950,7 @@
                 <a:latin typeface="微軟正黑體" pitchFamily="34" charset="-120"/>
                 <a:ea typeface="微軟正黑體" pitchFamily="34" charset="-120"/>
               </a:rPr>
-              <a:t>哈利路</a:t>
-            </a:r>
-            <a:r>
-              <a:rPr lang="zh-TW" altLang="en-US" sz="4800" b="1" dirty="0" smtClean="0">
-                <a:solidFill>
-                  <a:srgbClr val="660033"/>
-                </a:solidFill>
-                <a:latin typeface="微軟正黑體" pitchFamily="34" charset="-120"/>
-                <a:ea typeface="微軟正黑體" pitchFamily="34" charset="-120"/>
-              </a:rPr>
-              <a:t>亞  祢</a:t>
-            </a:r>
-            <a:r>
-              <a:rPr lang="zh-TW" altLang="en-US" sz="4800" b="1" dirty="0">
-                <a:solidFill>
-                  <a:srgbClr val="660033"/>
-                </a:solidFill>
-                <a:latin typeface="微軟正黑體" pitchFamily="34" charset="-120"/>
-                <a:ea typeface="微軟正黑體" pitchFamily="34" charset="-120"/>
-              </a:rPr>
-              <a:t>已</a:t>
-            </a:r>
-            <a:r>
-              <a:rPr lang="zh-TW" altLang="en-US" sz="4800" b="1" dirty="0">
-                <a:solidFill>
-                  <a:srgbClr val="660033"/>
-                </a:solidFill>
-                <a:latin typeface="微軟正黑體" pitchFamily="34" charset="-120"/>
-                <a:ea typeface="微軟正黑體" pitchFamily="34" charset="-120"/>
-              </a:rPr>
-              <a:t>得勝</a:t>
+              <a:t>哈利路亞  祢已得勝</a:t>
             </a:r>
           </a:p>
         </p:txBody>
@@ -4294,8 +3963,8 @@
         </p:nvSpPr>
         <p:spPr>
           <a:xfrm>
-            <a:off x="0" y="3939902"/>
-            <a:ext cx="9144000" cy="646331"/>
+            <a:off x="0" y="4001457"/>
+            <a:ext cx="9144000" cy="523220"/>
           </a:xfrm>
           <a:prstGeom prst="rect">
             <a:avLst/>
@@ -4310,55 +3979,39 @@
           <a:p>
             <a:pPr algn="ctr"/>
             <a:r>
-              <a:rPr lang="en-US" sz="3600" b="1" dirty="0">
+              <a:rPr lang="en-US" sz="2800" b="1" dirty="0">
                 <a:solidFill>
                   <a:srgbClr val="660033"/>
                 </a:solidFill>
-                <a:effectLst/>
                 <a:latin typeface="Microsoft JhengHei" panose="020B0604030504040204" pitchFamily="34" charset="-120"/>
                 <a:ea typeface="Microsoft JhengHei" panose="020B0604030504040204" pitchFamily="34" charset="-120"/>
               </a:rPr>
               <a:t>( </a:t>
             </a:r>
             <a:r>
-              <a:rPr lang="zh-CN" altLang="en-US" sz="3600" b="1" dirty="0" smtClean="0">
+              <a:rPr lang="zh-CN" altLang="en-US" sz="2800" b="1" dirty="0">
                 <a:solidFill>
                   <a:srgbClr val="660033"/>
                 </a:solidFill>
-                <a:effectLst/>
                 <a:latin typeface="Microsoft JhengHei" panose="020B0604030504040204" pitchFamily="34" charset="-120"/>
                 <a:ea typeface="Microsoft JhengHei" panose="020B0604030504040204" pitchFamily="34" charset="-120"/>
               </a:rPr>
-              <a:t>副</a:t>
-            </a:r>
-            <a:r>
-              <a:rPr lang="en-US" sz="3600" b="1" dirty="0" smtClean="0">
+              <a:t>副歌</a:t>
+            </a:r>
+            <a:r>
+              <a:rPr lang="en-US" sz="2800" b="1" dirty="0">
                 <a:solidFill>
                   <a:srgbClr val="660033"/>
                 </a:solidFill>
-                <a:effectLst/>
                 <a:latin typeface="Microsoft JhengHei" panose="020B0604030504040204" pitchFamily="34" charset="-120"/>
                 <a:ea typeface="Microsoft JhengHei" panose="020B0604030504040204" pitchFamily="34" charset="-120"/>
               </a:rPr>
-              <a:t> </a:t>
-            </a:r>
-            <a:r>
-              <a:rPr lang="en-US" sz="3600" b="1" dirty="0">
-                <a:solidFill>
-                  <a:srgbClr val="660033"/>
-                </a:solidFill>
-                <a:effectLst/>
-                <a:latin typeface="Microsoft JhengHei" panose="020B0604030504040204" pitchFamily="34" charset="-120"/>
-                <a:ea typeface="Microsoft JhengHei" panose="020B0604030504040204" pitchFamily="34" charset="-120"/>
-              </a:rPr>
-              <a:t>)</a:t>
-            </a:r>
-            <a:endParaRPr lang="vi-VN" sz="3600" b="1" dirty="0">
+              <a:t> )</a:t>
+            </a:r>
+            <a:endParaRPr lang="vi-VN" sz="2800" b="1" dirty="0">
               <a:solidFill>
                 <a:srgbClr val="660033"/>
               </a:solidFill>
-              <a:effectLst/>
-              <a:latin typeface="Microsoft JhengHei" panose="020B0604030504040204" pitchFamily="34" charset="-120"/>
               <a:ea typeface="Microsoft JhengHei" panose="020B0604030504040204" pitchFamily="34" charset="-120"/>
             </a:endParaRPr>
           </a:p>
